--- a/files/CS449/Petrucci/CS_0449_Recitation_5.pptx
+++ b/files/CS449/Petrucci/CS_0449_Recitation_5.pptx
@@ -7931,6 +7931,14 @@
 <file path=ppt/slides/slide16.xml><?xml version="1.0" encoding="utf-8"?>
 <p:sld xmlns:a="http://schemas.openxmlformats.org/drawingml/2006/main" xmlns:r="http://schemas.openxmlformats.org/officeDocument/2006/relationships" xmlns:p="http://schemas.openxmlformats.org/presentationml/2006/main">
   <p:cSld>
+    <p:bg>
+      <p:bgPr>
+        <a:solidFill>
+          <a:srgbClr val="0070C0"/>
+        </a:solidFill>
+        <a:effectLst/>
+      </p:bgPr>
+    </p:bg>
     <p:spTree>
       <p:nvGrpSpPr>
         <p:cNvPr id="1" name=""/>
@@ -8084,146 +8092,204 @@
           </a:p>
         </p:txBody>
       </p:sp>
-      <p:sp>
-        <p:nvSpPr>
-          <p:cNvPr id="3" name="Content Placeholder 2">
-            <a:extLst>
-              <a:ext uri="{FF2B5EF4-FFF2-40B4-BE49-F238E27FC236}">
-                <a16:creationId xmlns:a16="http://schemas.microsoft.com/office/drawing/2014/main" id="{B697812D-6C59-49AB-BF5F-8F1D7838FA74}"/>
-              </a:ext>
-            </a:extLst>
-          </p:cNvPr>
-          <p:cNvSpPr>
-            <a:spLocks noGrp="1"/>
-          </p:cNvSpPr>
-          <p:nvPr>
-            <p:ph idx="1"/>
-          </p:nvPr>
-        </p:nvSpPr>
-        <p:spPr/>
-        <p:txBody>
-          <a:bodyPr/>
-          <a:lstStyle/>
-          <a:p>
-            <a:r>
-              <a:rPr lang="en-US" dirty="0"/>
-              <a:t>Implicitly set by </a:t>
-            </a:r>
-            <a:r>
-              <a:rPr lang="en-US" b="1" dirty="0"/>
-              <a:t>Arithmetic </a:t>
-            </a:r>
-            <a:r>
-              <a:rPr lang="en-US" dirty="0"/>
-              <a:t>Operations</a:t>
-            </a:r>
-          </a:p>
-          <a:p>
-            <a:r>
-              <a:rPr lang="en-US" dirty="0"/>
-              <a:t>Example: </a:t>
-            </a:r>
-            <a:r>
-              <a:rPr lang="en-US" b="1" dirty="0" err="1"/>
-              <a:t>addq</a:t>
-            </a:r>
-            <a:r>
-              <a:rPr lang="en-US" b="1" dirty="0"/>
-              <a:t> </a:t>
-            </a:r>
-            <a:r>
-              <a:rPr lang="en-US" b="1" dirty="0" err="1"/>
-              <a:t>src</a:t>
-            </a:r>
-            <a:r>
-              <a:rPr lang="en-US" b="1" dirty="0"/>
-              <a:t>, </a:t>
-            </a:r>
-            <a:r>
-              <a:rPr lang="en-US" b="1" dirty="0" err="1"/>
-              <a:t>dest</a:t>
-            </a:r>
-            <a:r>
-              <a:rPr lang="en-US" b="1" dirty="0"/>
-              <a:t> &lt;-&gt; r = d + s</a:t>
-            </a:r>
-          </a:p>
-          <a:p>
-            <a:endParaRPr lang="en-US" dirty="0"/>
-          </a:p>
-          <a:p>
-            <a:r>
-              <a:rPr lang="en-US" dirty="0"/>
-              <a:t>Carry Flag (CF): </a:t>
-            </a:r>
-            <a:r>
-              <a:rPr lang="en-US" b="1" dirty="0"/>
-              <a:t>CF = 1</a:t>
-            </a:r>
-            <a:r>
-              <a:rPr lang="en-US" dirty="0"/>
-              <a:t> if Carry Out from MSB (</a:t>
-            </a:r>
-            <a:r>
-              <a:rPr lang="en-US" b="1" dirty="0"/>
-              <a:t>Unsigned Overflow</a:t>
-            </a:r>
-            <a:r>
-              <a:rPr lang="en-US" dirty="0"/>
-              <a:t>)</a:t>
-            </a:r>
-            <a:endParaRPr lang="en-US" b="1" dirty="0"/>
-          </a:p>
-          <a:p>
-            <a:r>
-              <a:rPr lang="en-US" dirty="0"/>
-              <a:t>Zero Flag (ZF): </a:t>
-            </a:r>
-            <a:r>
-              <a:rPr lang="en-US" b="1" dirty="0"/>
-              <a:t>ZF = 1 </a:t>
-            </a:r>
-            <a:r>
-              <a:rPr lang="en-US" dirty="0"/>
-              <a:t>if r = 0</a:t>
-            </a:r>
-          </a:p>
-          <a:p>
-            <a:r>
-              <a:rPr lang="en-US" dirty="0"/>
-              <a:t>Sign Flag (SF): </a:t>
-            </a:r>
-            <a:r>
-              <a:rPr lang="en-US" b="1" dirty="0"/>
-              <a:t>SF = 1</a:t>
-            </a:r>
-            <a:r>
-              <a:rPr lang="en-US" dirty="0"/>
-              <a:t> if r &lt; 0 (MSB is 1)</a:t>
-            </a:r>
-          </a:p>
-          <a:p>
-            <a:r>
-              <a:rPr lang="en-US" dirty="0"/>
-              <a:t>Overflow Flag (OF): </a:t>
-            </a:r>
-            <a:r>
-              <a:rPr lang="en-US" b="1" dirty="0"/>
-              <a:t>OF = 1</a:t>
-            </a:r>
-            <a:r>
-              <a:rPr lang="en-US" dirty="0"/>
-              <a:t> if signed overflow</a:t>
-            </a:r>
-          </a:p>
-          <a:p>
-            <a:pPr marL="0" indent="0">
-              <a:buNone/>
-            </a:pPr>
-            <a:endParaRPr lang="en-US" dirty="0"/>
-          </a:p>
-        </p:txBody>
-      </p:sp>
+      <mc:AlternateContent xmlns:mc="http://schemas.openxmlformats.org/markup-compatibility/2006">
+        <mc:Choice xmlns:a14="http://schemas.microsoft.com/office/drawing/2010/main" Requires="a14">
+          <p:sp>
+            <p:nvSpPr>
+              <p:cNvPr id="3" name="Content Placeholder 2">
+                <a:extLst>
+                  <a:ext uri="{FF2B5EF4-FFF2-40B4-BE49-F238E27FC236}">
+                    <a16:creationId xmlns:a16="http://schemas.microsoft.com/office/drawing/2014/main" id="{B697812D-6C59-49AB-BF5F-8F1D7838FA74}"/>
+                  </a:ext>
+                </a:extLst>
+              </p:cNvPr>
+              <p:cNvSpPr>
+                <a:spLocks noGrp="1"/>
+              </p:cNvSpPr>
+              <p:nvPr>
+                <p:ph idx="1"/>
+              </p:nvPr>
+            </p:nvSpPr>
+            <p:spPr/>
+            <p:txBody>
+              <a:bodyPr/>
+              <a:lstStyle/>
+              <a:p>
+                <a:r>
+                  <a:rPr lang="en-US" dirty="0"/>
+                  <a:t>Implicitly set by </a:t>
+                </a:r>
+                <a:r>
+                  <a:rPr lang="en-US" b="1" dirty="0"/>
+                  <a:t>Arithmetic </a:t>
+                </a:r>
+                <a:r>
+                  <a:rPr lang="en-US" dirty="0"/>
+                  <a:t>Operations</a:t>
+                </a:r>
+              </a:p>
+              <a:p>
+                <a:r>
+                  <a:rPr lang="en-US" dirty="0"/>
+                  <a:t>Example: </a:t>
+                </a:r>
+                <a:r>
+                  <a:rPr lang="en-US" b="1" dirty="0" err="1"/>
+                  <a:t>addq</a:t>
+                </a:r>
+                <a:r>
+                  <a:rPr lang="en-US" b="1" dirty="0"/>
+                  <a:t> </a:t>
+                </a:r>
+                <a:r>
+                  <a:rPr lang="en-US" b="1" dirty="0" err="1"/>
+                  <a:t>src</a:t>
+                </a:r>
+                <a:r>
+                  <a:rPr lang="en-US" b="1" dirty="0"/>
+                  <a:t>, </a:t>
+                </a:r>
+                <a:r>
+                  <a:rPr lang="en-US" b="1" dirty="0" err="1"/>
+                  <a:t>dest</a:t>
+                </a:r>
+                <a:r>
+                  <a:rPr lang="en-US" b="1" dirty="0"/>
+                  <a:t> </a:t>
+                </a:r>
+                <a14:m>
+                  <m:oMath xmlns:m="http://schemas.openxmlformats.org/officeDocument/2006/math">
+                    <m:r>
+                      <a:rPr lang="en-US" b="1" i="1" smtClean="0">
+                        <a:latin typeface="Cambria Math" panose="02040503050406030204" pitchFamily="18" charset="0"/>
+                        <a:ea typeface="Cambria Math" panose="02040503050406030204" pitchFamily="18" charset="0"/>
+                      </a:rPr>
+                      <m:t>↔</m:t>
+                    </m:r>
+                  </m:oMath>
+                </a14:m>
+                <a:r>
+                  <a:rPr lang="en-US" b="1" dirty="0"/>
+                  <a:t> r = d + s</a:t>
+                </a:r>
+              </a:p>
+              <a:p>
+                <a:endParaRPr lang="en-US" dirty="0"/>
+              </a:p>
+              <a:p>
+                <a:r>
+                  <a:rPr lang="en-US" dirty="0"/>
+                  <a:t>Carry Flag (CF): </a:t>
+                </a:r>
+                <a:r>
+                  <a:rPr lang="en-US" b="1" dirty="0"/>
+                  <a:t>CF = 1</a:t>
+                </a:r>
+                <a:r>
+                  <a:rPr lang="en-US" dirty="0"/>
+                  <a:t> if Carry Out from MSB (</a:t>
+                </a:r>
+                <a:r>
+                  <a:rPr lang="en-US" b="1" dirty="0"/>
+                  <a:t>Unsigned Overflow</a:t>
+                </a:r>
+                <a:r>
+                  <a:rPr lang="en-US" dirty="0"/>
+                  <a:t>)</a:t>
+                </a:r>
+                <a:endParaRPr lang="en-US" b="1" dirty="0"/>
+              </a:p>
+              <a:p>
+                <a:r>
+                  <a:rPr lang="en-US" dirty="0"/>
+                  <a:t>Zero Flag (ZF): </a:t>
+                </a:r>
+                <a:r>
+                  <a:rPr lang="en-US" b="1" dirty="0"/>
+                  <a:t>ZF = 1 </a:t>
+                </a:r>
+                <a:r>
+                  <a:rPr lang="en-US" dirty="0"/>
+                  <a:t>if r = 0</a:t>
+                </a:r>
+              </a:p>
+              <a:p>
+                <a:r>
+                  <a:rPr lang="en-US" dirty="0"/>
+                  <a:t>Sign Flag (SF): </a:t>
+                </a:r>
+                <a:r>
+                  <a:rPr lang="en-US" b="1" dirty="0"/>
+                  <a:t>SF = 1</a:t>
+                </a:r>
+                <a:r>
+                  <a:rPr lang="en-US" dirty="0"/>
+                  <a:t> if r &lt; 0 (MSB is 1)</a:t>
+                </a:r>
+              </a:p>
+              <a:p>
+                <a:r>
+                  <a:rPr lang="en-US" dirty="0"/>
+                  <a:t>Overflow Flag (OF): </a:t>
+                </a:r>
+                <a:r>
+                  <a:rPr lang="en-US" b="1" dirty="0"/>
+                  <a:t>OF = 1</a:t>
+                </a:r>
+                <a:r>
+                  <a:rPr lang="en-US" dirty="0"/>
+                  <a:t> if signed overflow</a:t>
+                </a:r>
+              </a:p>
+              <a:p>
+                <a:pPr marL="0" indent="0">
+                  <a:buNone/>
+                </a:pPr>
+                <a:endParaRPr lang="en-US" dirty="0"/>
+              </a:p>
+            </p:txBody>
+          </p:sp>
+        </mc:Choice>
+        <mc:Fallback>
+          <p:sp>
+            <p:nvSpPr>
+              <p:cNvPr id="3" name="Content Placeholder 2">
+                <a:extLst>
+                  <a:ext uri="{FF2B5EF4-FFF2-40B4-BE49-F238E27FC236}">
+                    <a16:creationId xmlns:a16="http://schemas.microsoft.com/office/drawing/2014/main" id="{B697812D-6C59-49AB-BF5F-8F1D7838FA74}"/>
+                  </a:ext>
+                </a:extLst>
+              </p:cNvPr>
+              <p:cNvSpPr>
+                <a:spLocks noGrp="1" noRot="1" noChangeAspect="1" noMove="1" noResize="1" noEditPoints="1" noAdjustHandles="1" noChangeArrowheads="1" noChangeShapeType="1" noTextEdit="1"/>
+              </p:cNvSpPr>
+              <p:nvPr>
+                <p:ph idx="1"/>
+              </p:nvPr>
+            </p:nvSpPr>
+            <p:spPr>
+              <a:blipFill>
+                <a:blip r:embed="rId2"/>
+                <a:stretch>
+                  <a:fillRect l="-473" t="-1179"/>
+                </a:stretch>
+              </a:blipFill>
+            </p:spPr>
+            <p:txBody>
+              <a:bodyPr/>
+              <a:lstStyle/>
+              <a:p>
+                <a:r>
+                  <a:rPr lang="en-US">
+                    <a:noFill/>
+                  </a:rPr>
+                  <a:t> </a:t>
+                </a:r>
+              </a:p>
+            </p:txBody>
+          </p:sp>
+        </mc:Fallback>
+      </mc:AlternateContent>
     </p:spTree>
     <p:extLst>
       <p:ext uri="{BB962C8B-B14F-4D97-AF65-F5344CB8AC3E}">
@@ -9845,7 +9911,7 @@
           <a:p>
             <a:r>
               <a:rPr lang="en-US" dirty="0"/>
-              <a:t>Getting the puzzle from an Executable!!!</a:t>
+              <a:t>Getting the password from an Executable!!!</a:t>
             </a:r>
           </a:p>
         </p:txBody>
@@ -9997,6 +10063,14 @@
 <file path=ppt/slides/slide20.xml><?xml version="1.0" encoding="utf-8"?>
 <p:sld xmlns:a="http://schemas.openxmlformats.org/drawingml/2006/main" xmlns:r="http://schemas.openxmlformats.org/officeDocument/2006/relationships" xmlns:p="http://schemas.openxmlformats.org/presentationml/2006/main">
   <p:cSld>
+    <p:bg>
+      <p:bgPr>
+        <a:solidFill>
+          <a:srgbClr val="0070C0"/>
+        </a:solidFill>
+        <a:effectLst/>
+      </p:bgPr>
+    </p:bg>
     <p:spTree>
       <p:nvGrpSpPr>
         <p:cNvPr id="1" name=""/>
@@ -12555,6 +12629,14 @@
 <file path=ppt/slides/slide24.xml><?xml version="1.0" encoding="utf-8"?>
 <p:sld xmlns:a="http://schemas.openxmlformats.org/drawingml/2006/main" xmlns:r="http://schemas.openxmlformats.org/officeDocument/2006/relationships" xmlns:p="http://schemas.openxmlformats.org/presentationml/2006/main">
   <p:cSld>
+    <p:bg>
+      <p:bgPr>
+        <a:solidFill>
+          <a:srgbClr val="0070C0"/>
+        </a:solidFill>
+        <a:effectLst/>
+      </p:bgPr>
+    </p:bg>
     <p:spTree>
       <p:nvGrpSpPr>
         <p:cNvPr id="1" name=""/>
@@ -14440,6 +14522,14 @@
 <file path=ppt/slides/slide29.xml><?xml version="1.0" encoding="utf-8"?>
 <p:sld xmlns:a="http://schemas.openxmlformats.org/drawingml/2006/main" xmlns:r="http://schemas.openxmlformats.org/officeDocument/2006/relationships" xmlns:p="http://schemas.openxmlformats.org/presentationml/2006/main">
   <p:cSld>
+    <p:bg>
+      <p:bgPr>
+        <a:solidFill>
+          <a:srgbClr val="0070C0"/>
+        </a:solidFill>
+        <a:effectLst/>
+      </p:bgPr>
+    </p:bg>
     <p:spTree>
       <p:nvGrpSpPr>
         <p:cNvPr id="1" name=""/>
@@ -14543,6 +14633,14 @@
 <file path=ppt/slides/slide3.xml><?xml version="1.0" encoding="utf-8"?>
 <p:sld xmlns:a="http://schemas.openxmlformats.org/drawingml/2006/main" xmlns:r="http://schemas.openxmlformats.org/officeDocument/2006/relationships" xmlns:p="http://schemas.openxmlformats.org/presentationml/2006/main">
   <p:cSld>
+    <p:bg>
+      <p:bgPr>
+        <a:solidFill>
+          <a:srgbClr val="0070C0"/>
+        </a:solidFill>
+        <a:effectLst/>
+      </p:bgPr>
+    </p:bg>
     <p:spTree>
       <p:nvGrpSpPr>
         <p:cNvPr id="1" name=""/>
@@ -15603,6 +15701,14 @@
 <file path=ppt/slides/slide32.xml><?xml version="1.0" encoding="utf-8"?>
 <p:sld xmlns:a="http://schemas.openxmlformats.org/drawingml/2006/main" xmlns:r="http://schemas.openxmlformats.org/officeDocument/2006/relationships" xmlns:p="http://schemas.openxmlformats.org/presentationml/2006/main">
   <p:cSld>
+    <p:bg>
+      <p:bgPr>
+        <a:solidFill>
+          <a:srgbClr val="0070C0"/>
+        </a:solidFill>
+        <a:effectLst/>
+      </p:bgPr>
+    </p:bg>
     <p:spTree>
       <p:nvGrpSpPr>
         <p:cNvPr id="1" name=""/>
@@ -22230,6 +22336,14 @@
 <file path=ppt/slides/slide9.xml><?xml version="1.0" encoding="utf-8"?>
 <p:sld xmlns:a="http://schemas.openxmlformats.org/drawingml/2006/main" xmlns:r="http://schemas.openxmlformats.org/officeDocument/2006/relationships" xmlns:p="http://schemas.openxmlformats.org/presentationml/2006/main">
   <p:cSld>
+    <p:bg>
+      <p:bgPr>
+        <a:solidFill>
+          <a:srgbClr val="0070C0"/>
+        </a:solidFill>
+        <a:effectLst/>
+      </p:bgPr>
+    </p:bg>
     <p:spTree>
       <p:nvGrpSpPr>
         <p:cNvPr id="1" name=""/>
